--- a/slides/study-simulation/study-simulation.pptx
+++ b/slides/study-simulation/study-simulation.pptx
@@ -813,7 +813,7 @@
           <a:lstStyle/>
           <a:p>
             <a:r>
-              <a:t>절차 생성은 규칙과 난수로 지형과 장면을 만든다. 핵심은 난이도 손잡이다. 같은 생성기에서 턱 높이나 경사각을 레벨로 올리면, 학습에서는 커리큘럼을 짤 수 있고 평가에서는 성공률이 떨어지기 시작하는 경계를 찾을 수 있다. 대규모 병렬 보행 학습에서 쓰인 게임식 커리큘럼은 로봇이 지형을 통과하면 다음 레벨로, 절반도 못 가면 이전 레벨로 옮긴다. 대신 절차 생성은 현실의 분포를 따르지 않는다는 한계가 있다.</a:t>
+              <a:t>절차 생성은 규칙과 난수로 지형과 장면을 만든다. 핵심은 난이도 파라미터다. 같은 생성기에서 턱 높이나 경사각을 레벨로 올리면, 학습에서는 커리큘럼을 설계할 수 있고 평가에서는 성공률이 떨어지기 시작하는 경계를 찾을 수 있다. 대규모 병렬 보행 학습에서 쓰인 게임식 커리큘럼은 로봇이 지형을 통과하면 다음 레벨로, 절반도 못 가면 이전 레벨로 옮긴다. 대신 절차 생성은 현실의 분포를 따르지 않는다는 한계가 있다.</a:t>
             </a:r>
           </a:p>
         </p:txBody>
@@ -1163,7 +1163,7 @@
           <a:lstStyle/>
           <a:p>
             <a:r>
-              <a:t>셋째 장은 시뮬과 현실의 차이다. 센서 시뮬레이션, 실제 장소를 시뮬로 옮기는 3DGS, 차이의 출처, 도메인 무작위화, 그리고 시뮬 결과가 현실 순위를 맞히는지 재는 예측력 측정을 본다.</a:t>
+              <a:t>셋째 장은 시뮬과 현실의 차이다. 센서 시뮬레이션, 실제 장소를 시뮬로 옮기는 3DGS, 차이의 출처, 도메인 랜덤화, 그리고 시뮬 결과가 현실 순위를 맞히는지 재는 예측력 측정을 본다.</a:t>
             </a:r>
           </a:p>
         </p:txBody>
@@ -1233,7 +1233,7 @@
           <a:lstStyle/>
           <a:p>
             <a:r>
-              <a:t>센서 시뮬레이션은 충실도의 사다리가 따로 있다. 가장 싼 것은 시뮬의 정답 지형을 그대로 주는 것이지만, 실제 센서는 앞의 물체에 가려 뒤를 보지 못하고 잡음과 지연이 있다. 정답 지도를 주는 시뮬은 연석 뒤 구덩이를 미리 알기 때문에 결과가 체계적으로 낙관적이다. 가장 큰 허점인 가림은 시선 검사 하나로 싸게 막을 수 있다. 그 위로 광선 투사 LiDAR와 렌더링 카메라가 있고, 각 수준이 무엇을 빠뜨리는지 알고 써야 한다.</a:t>
+              <a:t>센서 시뮬레이션은 충실도의 사다리가 따로 있다. 가장 싼 것은 시뮬의 정답 지형을 그대로 주는 것이지만, 실제 센서는 앞의 물체에 가려 뒤를 보지 못하고 잡음과 지연이 있다. 정답 지도를 주는 시뮬은 연석 뒤 구덩이를 미리 알기 때문에 결과가 체계적으로 낙관적이다. 가장 큰 허점인 가림은 가시선 검사 하나로 싸게 막을 수 있다. 그 위로 광선 투사 LiDAR와 렌더링 카메라가 있고, 각 수준이 무엇을 빠뜨리는지 알고 써야 한다.</a:t>
             </a:r>
           </a:p>
         </p:txBody>
@@ -1303,7 +1303,7 @@
           <a:lstStyle/>
           <a:p>
             <a:r>
-              <a:t>시뮬레이션은 하나의 도구가 아니라 충실도와 비용이 다른 여러 도구의 묶음이다. 1장은 물리 엔진의 내부, 2장은 그 위에 놓을 세상과 사람, 3장은 현실과의 차이와 그 측정을 다룬다. 마지막 장은 복습용이다.</a:t>
+              <a:t>시뮬레이션은 하나의 도구가 아니라 충실도와 비용이 다른 여러 도구의 집합이다. 1장은 물리 엔진의 내부, 2장은 그 위에 놓을 세상과 사람, 3장은 현실과의 차이와 그 측정을 다룬다. 마지막 장은 복습용이다.</a:t>
             </a:r>
           </a:p>
         </p:txBody>
@@ -1513,7 +1513,7 @@
           <a:lstStyle/>
           <a:p>
             <a:r>
-              <a:t>현실의 마찰, 질량, 지연을 정확히 모른다면, 시뮬에서 그 값들을 넓은 범위로 무작위로 바꿔 가며 학습하거나 튜닝한다. 그러면 현실의 값은 그 범위 안의 또 하나의 표본이 되고, 정책이나 제어기는 그 범위 전체에서 동작하도록 배운다. 그림처럼 한 값에서 최적화한 제어기는 그 값에서는 빠르지만, 값이 조금만 달라도 무너진다. 대가는 보수성이다. 범위가 넓을수록 느리고 조심스러워진다. 그래서 실측으로 범위를 좁히는 보정과 함께 쓴다.</a:t>
+              <a:t>현실의 마찰, 질량, 지연을 정확히 모른다면, 시뮬에서 그 값들을 넓은 범위에서 랜덤하게 바꿔 가며 학습하거나 튜닝한다. 그러면 현실의 값은 그 범위 안의 또 하나의 샘플이 되고, 정책이나 제어기는 그 범위 전체에서 동작하도록 배운다. 그림처럼 한 값에서 최적화한 제어기는 그 값에서는 빠르지만, 값이 조금만 달라도 무너진다. 대가는 보수성이다. 범위가 넓을수록 느리고 조심스러워진다. 그래서 실측으로 범위를 좁히는 보정과 함께 쓴다.</a:t>
             </a:r>
           </a:p>
         </p:txBody>
@@ -1653,7 +1653,7 @@
           <a:lstStyle/>
           <a:p>
             <a:r>
-              <a:t>바퀴와 지면의 접촉은 시뮬에서 정확히 풀기 어렵다. 그래서 바퀴 로봇 연구 대부분은 접촉을 풀지 않고, 운동학 모델로 굴리거나 단단한 면과 무작위화로 대신한다. 놀랍게도 그렇게 학습한 정책이 실물로 잘 옮겨진 경우가 많다. 자갈 위 rover 연구에서는 비싼 입자 시뮬로 미세조정한 것이 오히려 나빴다. 다만 이 결과들은 느린 속도나 특정 지면에서 나온 것이라, 다른 로봇에 그대로 옮길 수 있는 범위는 따로 확인해야 한다.</a:t>
+              <a:t>바퀴와 지면의 접촉은 시뮬에서 정확히 풀기 어렵다. 그래서 바퀴 로봇 연구 대부분은 접촉을 풀지 않고, 운동학 모델로 움직이거나 강체 지면과 랜덤화로 대신한다. 놀랍게도 그렇게 학습한 정책이 실물로 잘 옮겨진 경우가 많다. 자갈 위 rover 연구에서는 비싼 입자 시뮬로 fine-tuning한 것이 오히려 나빴다. 다만 이 결과들은 느린 속도나 특정 지면에서 나온 것이라, 다른 로봇에 그대로 옮길 수 있는 범위는 따로 확인해야 한다.</a:t>
             </a:r>
           </a:p>
         </p:txBody>
@@ -1723,7 +1723,7 @@
           <a:lstStyle/>
           <a:p>
             <a:r>
-              <a:t>정밀한 물리가 늘 답은 아니다. 많은 경우 단순한 모델과 넓은 무작위화가 비싼 정밀 시뮬보다 나았다. 가장 확실한 투자는 시뮬의 결론이 현실에서도 맞는지 재는 것이다. 그래야 어디에 충실도를 더할지 근거를 가지고 정할 수 있다.</a:t>
+              <a:t>정밀한 물리가 늘 답은 아니다. 많은 경우 단순한 모델과 넓은 랜덤화가 비싼 정밀 시뮬보다 나았다. 가장 확실한 투자는 시뮬의 결론이 현실에서도 맞는지 재는 것이다. 그래야 어디에 충실도를 더할지 근거를 가지고 정할 수 있다.</a:t>
             </a:r>
           </a:p>
         </p:txBody>
@@ -2073,7 +2073,7 @@
           <a:lstStyle/>
           <a:p>
             <a:r>
-              <a:t>여섯 번째 덱이다. 강화학습 덱에서 본 PPO는 수천 개의 병렬 시뮬 환경이 있어야 돌고, 앞의 모든 덱의 방법은 결국 시뮬에서 비교된다. 그래서 학습 덱 다음에 두었다. 적분기는 MPC 덱의 이산화와 같은 이야기이고, 보행자 모델은 인식 덱의 사람 추적과 이어진다. 여기서 본 무작위화와 예측력은 다리 로봇 덱에서 실물 이전의 바탕이 된다. 일곱 덱 전체의 순서와 10주 계획은 로드맵 덱에 있다.</a:t>
+              <a:t>여섯 번째 덱이다. 강화학습 덱에서 본 PPO는 수천 개의 병렬 시뮬 환경이 있어야 돌고, 앞의 모든 덱의 방법은 결국 시뮬에서 비교된다. 그래서 학습 덱 다음에 두었다. 적분기는 MPC 덱의 이산화와 같은 이야기이고, 보행자 모델은 인식 덱의 사람 추적과 이어진다. 여기서 본 랜덤화와 예측력은 다리 로봇 덱에서 sim-to-real의 바탕이 된다. 일곱 덱 전체의 순서와 10주 계획은 로드맵 덱에 있다.</a:t>
             </a:r>
           </a:p>
         </p:txBody>
@@ -2353,7 +2353,7 @@
           <a:lstStyle/>
           <a:p>
             <a:r>
-              <a:t>시뮬레이터는 물리 법칙을 미분 방정식으로 적고 작은 시간 스텝으로 푸는 프로그램이다. 스텝을 어떻게 나아가느냐가 정확도와 안정성을 정하고, 물체가 맞닿을 때의 처리가 가장 어렵다. 그리고 시뮬로 두 방법을 비교하려면 결과가 재현되어야 하고, 에피소드 결과를 통계로 읽어야 한다. 이 네 가지가 이후 모든 장에 나온다.</a:t>
+              <a:t>시뮬레이터는 물리 법칙을 미분 방정식으로 적고 작은 시간 스텝으로 푸는 프로그램이다. 스텝을 어떻게 진행하느냐가 정확도와 안정성을 정하고, 물체가 맞닿을 때의 처리가 가장 어렵다. 그리고 시뮬로 두 방법을 비교하려면 결과가 재현되어야 하고, 에피소드 결과를 통계로 읽어야 한다. 이 네 가지가 이후 모든 장에 나온다.</a:t>
             </a:r>
           </a:p>
         </p:txBody>
@@ -2563,7 +2563,7 @@
           <a:lstStyle/>
           <a:p>
             <a:r>
-              <a:t>시뮬레이터는 매 스텝 속도와 위치를 갱신한다. 순서 하나로 결과가 크게 달라진다. 명시적 Euler는 진동하는 시스템에서 에너지를 조금씩 만들어 내 결국 발산한다. 속도를 먼저 갱신하고 그 새 속도로 위치를 갱신하는 반암시적 Euler는 계산이 같은데도 에너지가 거의 보존된다. 그래서 대부분의 게임·로봇 물리 엔진이 이 방식을 기본으로 쓴다. 접촉처럼 매우 뻣뻣한 힘은 암시적 방법이나 제약 기반 풀이로 다룬다.</a:t>
+              <a:t>시뮬레이터는 매 스텝 속도와 위치를 갱신한다. 순서 하나로 결과가 크게 달라진다. 명시적 Euler는 진동하는 시스템에서 에너지를 조금씩 만들어 내 결국 발산한다. 속도를 먼저 갱신하고 그 새 속도로 위치를 갱신하는 반암시적 Euler는 계산이 같은데도 에너지가 거의 보존된다. 그래서 대부분의 게임·로봇 물리 엔진이 이 방식을 기본으로 쓴다. 접촉처럼 매우 stiff한 힘은 암시적 방법이나 제약 기반 풀이로 다룬다.</a:t>
             </a:r>
           </a:p>
         </p:txBody>
@@ -2633,7 +2633,7 @@
           <a:lstStyle/>
           <a:p>
             <a:r>
-              <a:t>접촉은 시뮬에서 가장 어려운 부분이다. 가장 단순한 방법은 물체가 겹친 깊이만큼 용수철 힘을 주는 벌점 방식인데, 강성이 낮으면 물체가 서로 박히고, 높이면 시간 스텝을 아주 작게 해야 안정하다. 그래서 현대 엔진은 접촉을 제약으로 다뤄 한 스텝 안에서 겹침이 없도록 힘을 푼다. 바퀴처럼 회전하며 닿는 접촉, 모래나 잔디처럼 변형되는 지면은 여전히 어렵고 비싸다. 그래서 많은 바퀴 로봇 연구는 접촉을 정밀하게 풀지 않고 운동학 모델과 무작위화로 대신한다.</a:t>
+              <a:t>접촉은 시뮬에서 가장 어려운 부분이다. 가장 단순한 방법은 물체가 겹친 깊이만큼 용수철 힘을 주는 페널티 방식인데, 강성이 낮으면 물체가 서로 박히고, 높이면 시간 스텝을 아주 작게 해야 안정하다. 그래서 현대 엔진은 접촉을 제약으로 다뤄 한 스텝 안에서 겹침이 없도록 힘을 푼다. 바퀴처럼 회전하며 닿는 접촉, 모래나 잔디처럼 변형되는 지면은 여전히 어렵고 비싸다. 그래서 많은 바퀴 로봇 연구는 접촉을 정밀하게 풀지 않고 운동학 모델과 도메인 랜덤화로 대신한다.</a:t>
             </a:r>
           </a:p>
         </p:txBody>
@@ -2703,7 +2703,7 @@
           <a:lstStyle/>
           <a:p>
             <a:r>
-              <a:t>엔진은 무엇이 필요한지로 고른다. 강화학습으로 정책을 학습하려면 GPU에서 수천 개 환경을 병렬로 굴리는 엔진이, 인식 파이프라인을 시험하려면 사실적인 센서 시뮬레이션이, 로봇 소프트웨어 전체를 시험하려면 ROS 연동이 필요하다. 접촉이 중요한 보행·조작 연구는 접촉 정확도를 본다. 그리고 실무에서 큰 요인은 생태계다. 쓰고 싶은 장면, 벤치마크, 로봇 모델이 이미 어느 엔진 위에 있는지가 선택을 정하는 경우가 많다.</a:t>
+              <a:t>엔진은 무엇이 필요한지로 고른다. 강화학습으로 정책을 학습하려면 GPU에서 수천 개 환경을 병렬로 돌리는 엔진이, 인식 파이프라인을 시험하려면 사실적인 센서 시뮬레이션이, 로봇 소프트웨어 전체를 시험하려면 ROS 연동이 필요하다. 접촉이 중요한 보행·조작 연구는 접촉 정확도를 본다. 그리고 실무에서 큰 요인은 생태계다. 쓰고 싶은 장면, 벤치마크, 로봇 모델이 이미 어느 엔진 위에 있는지가 선택을 정하는 경우가 많다.</a:t>
             </a:r>
           </a:p>
         </p:txBody>
@@ -6155,7 +6155,7 @@
         <p:spPr>
           <a:xfrm>
             <a:off x="5456734" y="5765800"/>
-            <a:ext cx="1316633" cy="330200"/>
+            <a:ext cx="1180703" cy="330200"/>
           </a:xfrm>
           <a:prstGeom prst="roundRect">
             <a:avLst>
@@ -6186,7 +6186,7 @@
         <p:spPr>
           <a:xfrm>
             <a:off x="5596434" y="5816600"/>
-            <a:ext cx="1093750" cy="336550"/>
+            <a:ext cx="953742" cy="336550"/>
           </a:xfrm>
           <a:prstGeom prst="rect">
             <a:avLst/>
@@ -6213,7 +6213,7 @@
                 <a:ea typeface="Malgun Gothic"/>
                 <a:cs typeface="Malgun Gothic"/>
               </a:rPr>
-              <a:t>무작위화 · SRCC</a:t>
+              <a:t>랜덤화 · SRCC</a:t>
             </a:r>
           </a:p>
         </p:txBody>
@@ -7911,7 +7911,7 @@
         <p:spPr>
           <a:xfrm>
             <a:off x="6388100" y="1507728"/>
-            <a:ext cx="1000820" cy="241300"/>
+            <a:ext cx="660995" cy="241300"/>
           </a:xfrm>
           <a:prstGeom prst="roundRect">
             <a:avLst>
@@ -7942,7 +7942,7 @@
         <p:spPr>
           <a:xfrm>
             <a:off x="6477000" y="1533128"/>
-            <a:ext cx="873110" cy="288925"/>
+            <a:ext cx="523091" cy="288925"/>
           </a:xfrm>
           <a:prstGeom prst="rect">
             <a:avLst/>
@@ -7969,7 +7969,7 @@
                 <a:ea typeface="Malgun Gothic"/>
                 <a:cs typeface="Malgun Gothic"/>
               </a:rPr>
-              <a:t>혼돈스러운 조건</a:t>
+              <a:t>혼돈 조건</a:t>
             </a:r>
           </a:p>
         </p:txBody>
@@ -8494,7 +8494,7 @@
                 <a:ea typeface="Malgun Gothic"/>
                 <a:cs typeface="Malgun Gothic"/>
               </a:rPr>
-              <a:t>절차 생성은 양과 난이도 손잡이를, 실측은 현실 분포를 준다. 사람은 규칙·사건·학습으로 움직인다.</a:t>
+              <a:t>절차 생성은 양과 난이도 조절을, 실측은 현실 분포를 준다. 사람은 규칙·사건·학습으로 움직인다.</a:t>
             </a:r>
           </a:p>
         </p:txBody>
@@ -8602,7 +8602,7 @@
                 <a:ea typeface="Malgun Gothic"/>
                 <a:cs typeface="Malgun Gothic"/>
               </a:rPr>
-              <a:t>지형 생성기에 난이도 손잡이를 두면 실패 경계와 학습 순서가 보인다</a:t>
+              <a:t>지형 생성기에 난이도 파라미터를 두면 실패 경계와 학습 순서가 보인다</a:t>
             </a:r>
           </a:p>
         </p:txBody>
@@ -8962,7 +8962,7 @@
                 <a:ea typeface="Malgun Gothic"/>
                 <a:cs typeface="Malgun Gothic"/>
               </a:rPr>
-              <a:t>양이 무한하고, 난이도를 손잡이로 조절한다. 포화된 벤치마크에서 실패가 시작되는 경계를 찾는다.</a:t>
+              <a:t>양이 무한하고, 난이도를 파라미터로 조절한다. 포화된 벤치마크에서 실패가 시작되는 경계를 찾는다.</a:t>
             </a:r>
           </a:p>
         </p:txBody>
@@ -11098,7 +11098,7 @@
                 <a:ea typeface="Malgun Gothic"/>
                 <a:cs typeface="Malgun Gothic"/>
               </a:rPr>
-              <a:t>칸 단위 지형 잇기(WFC), GPU ORCA 보행자, 환경 256개를 1,800–2,600 fps.</a:t>
+              <a:t>타일 단위 지형 잇기(WFC), GPU ORCA 보행자, 환경 256개를 1,800–2,600 fps.</a:t>
             </a:r>
           </a:p>
         </p:txBody>
@@ -13599,7 +13599,7 @@
                           <a:ea typeface="Malgun Gothic"/>
                           <a:cs typeface="Malgun Gothic"/>
                         </a:rPr>
-                        <a:t>절차 생성: 양·난이도 손잡이</a:t>
+                        <a:t>절차 생성: 양·난이도 조절</a:t>
                       </a:r>
                     </a:p>
                   </a:txBody>
@@ -13771,7 +13771,7 @@
                           <a:ea typeface="Malgun Gothic"/>
                           <a:cs typeface="Malgun Gothic"/>
                         </a:rPr>
-                        <a:t>학습·생성: 다양, 학습에 값짐</a:t>
+                        <a:t>학습·생성: 다양, 학습에 유용</a:t>
                       </a:r>
                     </a:p>
                   </a:txBody>
@@ -14228,7 +14228,7 @@
         </p:nvGraphicFramePr>
         <p:xfrm>
           <a:off x="711200" y="1361678"/>
-          <a:ext cx="10769599" cy="1392302"/>
+          <a:ext cx="10769600" cy="1392302"/>
         </p:xfrm>
         <a:graphic>
           <a:graphicData uri="http://schemas.openxmlformats.org/drawingml/2006/table">
@@ -14237,10 +14237,10 @@
                 <a:tableStyleId>{5C22544A-7EE6-4342-B048-85BDC9FD1C3A}</a:tableStyleId>
               </a:tblPr>
               <a:tblGrid>
-                <a:gridCol w="1747738"/>
-                <a:gridCol w="3611959"/>
-                <a:gridCol w="2413992"/>
-                <a:gridCol w="2995910"/>
+                <a:gridCol w="1525687"/>
+                <a:gridCol w="4521101"/>
+                <a:gridCol w="2107406"/>
+                <a:gridCol w="2615406"/>
               </a:tblGrid>
               <a:tr h="285477">
                 <a:tc>
@@ -14477,7 +14477,7 @@
                           <a:ea typeface="Malgun Gothic"/>
                           <a:cs typeface="Malgun Gothic"/>
                         </a:rPr>
-                        <a:t>2.5D 시선 검사로 못 보는 칸을 지운다</a:t>
+                        <a:t>2.5D 가시선(line-of-sight) 검사로 못 보는 셀을 지운다</a:t>
                       </a:r>
                     </a:p>
                   </a:txBody>
@@ -16204,7 +16204,7 @@
                 <a:ea typeface="Malgun Gothic"/>
                 <a:cs typeface="Malgun Gothic"/>
               </a:rPr>
-              <a:t>LiDAR·RTK·어안 스캔 530곳. 영상만으로 잡은 자세는 축척을 맞춘 뒤에도 0.30 m, 5.0° 어긋났다. 기하가 부정확한 장면은 평가도 미세조정도 흔든다.</a:t>
+              <a:t>LiDAR·RTK·어안 스캔 530곳. 영상만으로 잡은 자세는 축척을 맞춘 뒤에도 0.30 m, 5.0° 어긋났다. 기하가 부정확한 장면은 평가도 fine-tuning도 흔든다.</a:t>
             </a:r>
           </a:p>
         </p:txBody>
@@ -16793,10 +16793,10 @@
                 <a:tableStyleId>{5C22544A-7EE6-4342-B048-85BDC9FD1C3A}</a:tableStyleId>
               </a:tblPr>
               <a:tblGrid>
-                <a:gridCol w="1022449"/>
-                <a:gridCol w="2487811"/>
-                <a:gridCol w="3105051"/>
-                <a:gridCol w="4154289"/>
+                <a:gridCol w="1045766"/>
+                <a:gridCol w="2544564"/>
+                <a:gridCol w="3175893"/>
+                <a:gridCol w="4003377"/>
               </a:tblGrid>
               <a:tr h="292814">
                 <a:tc>
@@ -16983,7 +16983,7 @@
                           <a:ea typeface="Malgun Gothic"/>
                           <a:cs typeface="Malgun Gothic"/>
                         </a:rPr>
-                        <a:t>지연·슬립 모델, 무작위화, 실측 보정</a:t>
+                        <a:t>지연·슬립 모델, 랜덤화, 실측 보정</a:t>
                       </a:r>
                     </a:p>
                   </a:txBody>
@@ -17081,7 +17081,7 @@
                           <a:ea typeface="Malgun Gothic"/>
                           <a:cs typeface="Malgun Gothic"/>
                         </a:rPr>
-                        <a:t>시선 검사, 잡음 모델, 광선 투사</a:t>
+                        <a:t>가시선 검사, 잡음 모델, 광선 투사</a:t>
                       </a:r>
                     </a:p>
                   </a:txBody>
@@ -17535,7 +17535,7 @@
                 <a:ea typeface="Malgun Gothic"/>
                 <a:cs typeface="Malgun Gothic"/>
               </a:rPr>
-              <a:t>3 · 도메인 무작위화</a:t>
+              <a:t>3 · 도메인 랜덤화</a:t>
             </a:r>
           </a:p>
         </p:txBody>
@@ -17576,7 +17576,7 @@
                 <a:ea typeface="Malgun Gothic"/>
                 <a:cs typeface="Malgun Gothic"/>
               </a:rPr>
-              <a:t>모르는 파라미터는 넓게 흔들어, 현실을 "또 하나의 표본"으로 만든다</a:t>
+              <a:t>모르는 파라미터는 넓게 흔들어, 현실을 "또 하나의 샘플"로 만든다</a:t>
             </a:r>
           </a:p>
         </p:txBody>
@@ -17674,7 +17674,7 @@
                 <a:ea typeface="Malgun Gothic"/>
                 <a:cs typeface="Malgun Gothic"/>
               </a:rPr>
-              <a:t>위치 PD 제어기 둘. 지연 0에서만 튜닝한 쪽은 그 값에서 빠르지만 지연 0.12 s 넘어서 무너지고, 지연 0–0.25 s 무작위화로 튜닝한 쪽은 느리지만 그 범위를 견딘다</a:t>
+              <a:t>위치 PD 제어기 둘. 지연 0에서만 튜닝한 쪽은 그 값에서 빠르지만 지연 0.12 s 넘어서 무너지고, 지연 0–0.25 s 랜덤화로 튜닝한 쪽은 느리지만 그 범위를 견딘다</a:t>
             </a:r>
           </a:p>
         </p:txBody>
@@ -18361,7 +18361,7 @@
         <p:spPr>
           <a:xfrm>
             <a:off x="8208367" y="4466828"/>
-            <a:ext cx="1230312" cy="241300"/>
+            <a:ext cx="1117005" cy="241300"/>
           </a:xfrm>
           <a:prstGeom prst="roundRect">
             <a:avLst>
@@ -18392,7 +18392,7 @@
         <p:spPr>
           <a:xfrm>
             <a:off x="8297267" y="4492228"/>
-            <a:ext cx="1109488" cy="288925"/>
+            <a:ext cx="992781" cy="288925"/>
           </a:xfrm>
           <a:prstGeom prst="rect">
             <a:avLst/>
@@ -18419,7 +18419,7 @@
                 <a:ea typeface="Malgun Gothic"/>
                 <a:cs typeface="Malgun Gothic"/>
               </a:rPr>
-              <a:t>자동 무작위화(ADR)</a:t>
+              <a:t>자동 랜덤화(ADR)</a:t>
             </a:r>
           </a:p>
         </p:txBody>
@@ -18914,7 +18914,7 @@
         <p:spPr>
           <a:xfrm>
             <a:off x="927100" y="2377281"/>
-            <a:ext cx="631031" cy="241300"/>
+            <a:ext cx="517723" cy="241300"/>
           </a:xfrm>
           <a:prstGeom prst="roundRect">
             <a:avLst>
@@ -18945,7 +18945,7 @@
         <p:spPr>
           <a:xfrm>
             <a:off x="1016000" y="2402681"/>
-            <a:ext cx="492228" cy="288925"/>
+            <a:ext cx="375521" cy="288925"/>
           </a:xfrm>
           <a:prstGeom prst="rect">
             <a:avLst/>
@@ -18972,7 +18972,7 @@
                 <a:ea typeface="Malgun Gothic"/>
                 <a:cs typeface="Malgun Gothic"/>
               </a:rPr>
-              <a:t>무작위화</a:t>
+              <a:t>랜덤화</a:t>
             </a:r>
           </a:p>
         </p:txBody>
@@ -19275,7 +19275,7 @@
                 <a:ea typeface="Malgun Gothic"/>
                 <a:cs typeface="Malgun Gothic"/>
               </a:rPr>
-              <a:t>실물 기록으로 모델 파라미터나 잔차를 맞춘다(액추에이터 망).</a:t>
+              <a:t>실물 기록으로 모델 파라미터나 잔차를 맞춘다(액추에이터 네트워크).</a:t>
             </a:r>
           </a:p>
         </p:txBody>
@@ -20266,7 +20266,7 @@
                 <a:ea typeface="Malgun Gothic"/>
                 <a:cs typeface="Malgun Gothic"/>
               </a:rPr>
-              <a:t>바퀴 접촉은 정밀하게 풀지 않고 운동학 모델과 무작위화로 옮긴다</a:t>
+              <a:t>바퀴 접촉은 정밀하게 풀지 않고 운동학 모델과 랜덤화로 옮긴다</a:t>
             </a:r>
           </a:p>
         </p:txBody>
@@ -20332,7 +20332,7 @@
                           <a:ea typeface="Malgun Gothic"/>
                           <a:cs typeface="Malgun Gothic"/>
                         </a:rPr>
-                        <a:t>바퀴 로봇을 굴린 방법</a:t>
+                        <a:t>바퀴 로봇을 움직인 방법</a:t>
                       </a:r>
                     </a:p>
                   </a:txBody>
@@ -20888,7 +20888,7 @@
                 <a:ea typeface="Malgun Gothic"/>
                 <a:cs typeface="Malgun Gothic"/>
               </a:rPr>
-              <a:t>단단한 면 + 절차 지형 + 지연·잡음 무작위화</a:t>
+              <a:t>강체 지면 + 절차 지형 + 지연·잡음 랜덤화</a:t>
             </a:r>
           </a:p>
         </p:txBody>
@@ -20974,7 +20974,7 @@
                 <a:ea typeface="Malgun Gothic"/>
                 <a:cs typeface="Malgun Gothic"/>
               </a:rPr>
-              <a:t>입자 미세조정은 약 82시간 더 들고 오히려 3.6 → 4.3 cm</a:t>
+              <a:t>입자 시뮬 fine-tuning은 약 82시간이 더 들고 오히려 3.6 → 4.3 cm</a:t>
             </a:r>
           </a:p>
         </p:txBody>
@@ -21394,7 +21394,7 @@
                           <a:ea typeface="Malgun Gothic"/>
                           <a:cs typeface="Malgun Gothic"/>
                         </a:rPr>
-                        <a:t>도메인 무작위화</a:t>
+                        <a:t>도메인 랜덤화</a:t>
                       </a:r>
                     </a:p>
                   </a:txBody>
@@ -21516,7 +21516,7 @@
                           <a:ea typeface="Malgun Gothic"/>
                           <a:cs typeface="Malgun Gothic"/>
                         </a:rPr>
-                        <a:t>실물 자료 필요</a:t>
+                        <a:t>실물 데이터 필요</a:t>
                       </a:r>
                     </a:p>
                   </a:txBody>
@@ -21831,7 +21831,7 @@
                 <a:ea typeface="Malgun Gothic"/>
                 <a:cs typeface="Malgun Gothic"/>
               </a:rPr>
-              <a:t> 낙관적 가정을 하나씩 켜 재고 → 무작위화로 견고하게 → 실물이 생기면 보정하고 예측력을 잰다.</a:t>
+              <a:t> 낙관적 가정을 하나씩 켜 재고 → 랜덤화로 견고하게 → 실물이 생기면 보정하고 예측력을 잰다.</a:t>
             </a:r>
           </a:p>
         </p:txBody>
@@ -23029,7 +23029,7 @@
                           <a:ea typeface="Malgun Gothic"/>
                           <a:cs typeface="Malgun Gothic"/>
                         </a:rPr>
-                        <a:t>무작위화</a:t>
+                        <a:t>랜덤화</a:t>
                       </a:r>
                     </a:p>
                   </a:txBody>
@@ -25319,7 +25319,7 @@
                 <a:ea typeface="Malgun Gothic"/>
                 <a:cs typeface="Malgun Gothic"/>
               </a:rPr>
-              <a:t>용수철 적분기 비교 → 공 튀기기(벌점 접촉) → 2D 운동학 로봇 + 가림 → Social Force 군중.</a:t>
+              <a:t>용수철 적분기 비교 → 공 튀기기(페널티 접촉) → 2D 운동학 로봇 + 가림 → Social Force 군중.</a:t>
             </a:r>
           </a:p>
         </p:txBody>
@@ -25622,7 +25622,7 @@
                 <a:ea typeface="Malgun Gothic"/>
                 <a:cs typeface="Malgun Gothic"/>
               </a:rPr>
-              <a:t>도메인 무작위화 → 게임식 커리큘럼 → Sim2Real Predictivity(SRCC) → GPUSimBench → 보도 벤치마크.</a:t>
+              <a:t>도메인 랜덤화 → 게임식 커리큘럼 → Sim2Real Predictivity(SRCC) → GPUSimBench → 보도 벤치마크.</a:t>
             </a:r>
           </a:p>
         </p:txBody>
@@ -25646,8 +25646,8 @@
                 <a:tableStyleId>{5C22544A-7EE6-4342-B048-85BDC9FD1C3A}</a:tableStyleId>
               </a:tblPr>
               <a:tblGrid>
-                <a:gridCol w="1946970"/>
-                <a:gridCol w="8822630"/>
+                <a:gridCol w="1903412"/>
+                <a:gridCol w="8866188"/>
               </a:tblGrid>
               <a:tr h="285477">
                 <a:tc>
@@ -25738,7 +25738,7 @@
                           <a:ea typeface="Malgun Gothic"/>
                           <a:cs typeface="Malgun Gothic"/>
                         </a:rPr>
-                        <a:t>명시적 Euler는 왜 에너지를 만드나? 벌점 접촉의 강성과 Δt는 어떤 관계인가?</a:t>
+                        <a:t>명시적 Euler는 왜 에너지를 만드나? 페널티 접촉의 강성과 Δt는 어떤 관계인가?</a:t>
                       </a:r>
                     </a:p>
                   </a:txBody>
@@ -25838,7 +25838,7 @@
                           <a:ea typeface="Malgun Gothic"/>
                           <a:cs typeface="Malgun Gothic"/>
                         </a:rPr>
-                        <a:t>무작위화의 대가는? 예측력은 왜 격차 줄이기보다 먼저인가?</a:t>
+                        <a:t>랜덤화의 대가는? 예측력은 왜 격차 줄이기보다 먼저인가?</a:t>
                       </a:r>
                     </a:p>
                   </a:txBody>
@@ -26275,7 +26275,7 @@
                 <a:ea typeface="Malgun Gothic"/>
                 <a:cs typeface="Malgun Gothic"/>
               </a:rPr>
-              <a:t>5 강화학습의 PPO와 표본 효율. 3 제어·4 MPC의 상태공간 모델과 적분.</a:t>
+              <a:t>5 강화학습의 PPO와 샘플 효율. 3 제어·4 MPC의 상태공간 모델과 적분.</a:t>
             </a:r>
           </a:p>
         </p:txBody>
@@ -26537,7 +26537,7 @@
                 <a:ea typeface="Malgun Gothic"/>
                 <a:cs typeface="Malgun Gothic"/>
               </a:rPr>
-              <a:t>도메인 무작위화·커리큘럼 → 7 다리 로봇의 sim-to-real. 잡음 바닥 → 모든 덱의 비교 실험.</a:t>
+              <a:t>도메인 랜덤화·커리큘럼 → 7 다리 로봇의 sim-to-real. 잡음 바닥 → 모든 덱의 비교 실험.</a:t>
             </a:r>
           </a:p>
         </p:txBody>
@@ -28714,7 +28714,7 @@
                           <a:ea typeface="Malgun Gothic"/>
                           <a:cs typeface="Malgun Gothic"/>
                         </a:rPr>
-                        <a:t>시각·동역학 도메인 무작위화</a:t>
+                        <a:t>시각·동역학 도메인 랜덤화</a:t>
                       </a:r>
                     </a:p>
                   </a:txBody>
@@ -30634,7 +30634,7 @@
                 <a:ea typeface="Malgun Gothic"/>
                 <a:cs typeface="Malgun Gothic"/>
               </a:rPr>
-              <a:t>에피소드는 표본이다</a:t>
+              <a:t>에피소드는 샘플이다</a:t>
             </a:r>
           </a:p>
         </p:txBody>
@@ -31530,7 +31530,7 @@
                 <a:ea typeface="Malgun Gothic"/>
                 <a:cs typeface="Malgun Gothic"/>
               </a:rPr>
-              <a:t>마찰 없는 용수철을 Δt = 0.1 s로 40초 굴렸다. 명시적 Euler는 에너지가 계속 늘고, 반암시적(symplectic) Euler와 RK4는 거의 지킨다</a:t>
+              <a:t>마찰 없는 용수철을 Δt = 0.1 s로 40초 시뮬레이션했다. 명시적 Euler는 에너지가 계속 늘고, 반암시적(symplectic) Euler와 RK4는 거의 지킨다</a:t>
             </a:r>
           </a:p>
         </p:txBody>
@@ -31544,11 +31544,11 @@
         <p:spPr>
           <a:xfrm>
             <a:off x="711200" y="4320778"/>
-            <a:ext cx="3488234" cy="1051520"/>
+            <a:ext cx="3488234" cy="1272480"/>
           </a:xfrm>
           <a:prstGeom prst="roundRect">
             <a:avLst>
-              <a:gd name="adj" fmla="val 7246"/>
+              <a:gd name="adj" fmla="val 5988"/>
             </a:avLst>
           </a:prstGeom>
           <a:solidFill>
@@ -31604,7 +31604,7 @@
         <p:spPr>
           <a:xfrm>
             <a:off x="4193084" y="4320778"/>
-            <a:ext cx="6350" cy="1051520"/>
+            <a:ext cx="6350" cy="1272480"/>
           </a:xfrm>
           <a:prstGeom prst="rect">
             <a:avLst/>
@@ -31632,7 +31632,7 @@
         </p:nvSpPr>
         <p:spPr>
           <a:xfrm>
-            <a:off x="711200" y="5365948"/>
+            <a:off x="711200" y="5586909"/>
             <a:ext cx="3488234" cy="6350"/>
           </a:xfrm>
           <a:prstGeom prst="rect">
@@ -31662,7 +31662,7 @@
         <p:spPr>
           <a:xfrm>
             <a:off x="711200" y="4320778"/>
-            <a:ext cx="50800" cy="1051520"/>
+            <a:ext cx="50800" cy="1272480"/>
           </a:xfrm>
           <a:prstGeom prst="roundRect">
             <a:avLst>
@@ -31792,7 +31792,7 @@
                 <a:ea typeface="Malgun Gothic"/>
                 <a:cs typeface="Malgun Gothic"/>
               </a:rPr>
-              <a:t>위치와 속도를 옛 값으로 동시에. 가장 단순하지만 진동계에서 발산한다.</a:t>
+              <a:t>위치와 속도를 이전 값으로 동시에 갱신한다. 가장 단순하지만 진동계에서 발산한다.</a:t>
             </a:r>
           </a:p>
         </p:txBody>
@@ -31806,11 +31806,11 @@
         <p:spPr>
           <a:xfrm>
             <a:off x="4351834" y="4320778"/>
-            <a:ext cx="3488234" cy="1051520"/>
+            <a:ext cx="3488234" cy="1272480"/>
           </a:xfrm>
           <a:prstGeom prst="roundRect">
             <a:avLst>
-              <a:gd name="adj" fmla="val 7246"/>
+              <a:gd name="adj" fmla="val 5988"/>
             </a:avLst>
           </a:prstGeom>
           <a:solidFill>
@@ -31866,7 +31866,7 @@
         <p:spPr>
           <a:xfrm>
             <a:off x="7833717" y="4320778"/>
-            <a:ext cx="6350" cy="1051520"/>
+            <a:ext cx="6350" cy="1272480"/>
           </a:xfrm>
           <a:prstGeom prst="rect">
             <a:avLst/>
@@ -31894,7 +31894,7 @@
         </p:nvSpPr>
         <p:spPr>
           <a:xfrm>
-            <a:off x="4351834" y="5365948"/>
+            <a:off x="4351834" y="5586909"/>
             <a:ext cx="3488234" cy="6350"/>
           </a:xfrm>
           <a:prstGeom prst="rect">
@@ -31924,7 +31924,7 @@
         <p:spPr>
           <a:xfrm>
             <a:off x="4351834" y="4320778"/>
-            <a:ext cx="50800" cy="1051520"/>
+            <a:ext cx="50800" cy="1272480"/>
           </a:xfrm>
           <a:prstGeom prst="roundRect">
             <a:avLst>
@@ -32027,7 +32027,7 @@
         <p:spPr>
           <a:xfrm>
             <a:off x="4567734" y="4784328"/>
-            <a:ext cx="3219310" cy="603200"/>
+            <a:ext cx="3219310" cy="879401"/>
           </a:xfrm>
           <a:prstGeom prst="rect">
             <a:avLst/>
@@ -32054,7 +32054,7 @@
                 <a:ea typeface="Malgun Gothic"/>
                 <a:cs typeface="Malgun Gothic"/>
               </a:rPr>
-              <a:t>속도를 먼저 갱신하고 새 속도로 위치를. 비용은 같은데 장시간 안정. 게임·로봇 엔진의 기본.</a:t>
+              <a:t>속도를 먼저 갱신하고, 그 속도로 위치를 갱신한다. 비용은 같은데 오래 돌려도 안정하다. 게임·로봇 엔진의 기본이다.</a:t>
             </a:r>
           </a:p>
         </p:txBody>
@@ -32068,11 +32068,11 @@
         <p:spPr>
           <a:xfrm>
             <a:off x="7992467" y="4320778"/>
-            <a:ext cx="3488234" cy="1051520"/>
+            <a:ext cx="3488234" cy="1272480"/>
           </a:xfrm>
           <a:prstGeom prst="roundRect">
             <a:avLst>
-              <a:gd name="adj" fmla="val 7246"/>
+              <a:gd name="adj" fmla="val 5988"/>
             </a:avLst>
           </a:prstGeom>
           <a:solidFill>
@@ -32128,7 +32128,7 @@
         <p:spPr>
           <a:xfrm>
             <a:off x="11474351" y="4320778"/>
-            <a:ext cx="6350" cy="1051520"/>
+            <a:ext cx="6350" cy="1272480"/>
           </a:xfrm>
           <a:prstGeom prst="rect">
             <a:avLst/>
@@ -32156,7 +32156,7 @@
         </p:nvSpPr>
         <p:spPr>
           <a:xfrm>
-            <a:off x="7992467" y="5365948"/>
+            <a:off x="7992467" y="5586909"/>
             <a:ext cx="3488234" cy="6350"/>
           </a:xfrm>
           <a:prstGeom prst="rect">
@@ -32186,7 +32186,7 @@
         <p:spPr>
           <a:xfrm>
             <a:off x="7992467" y="4320778"/>
-            <a:ext cx="50800" cy="1051520"/>
+            <a:ext cx="50800" cy="1272480"/>
           </a:xfrm>
           <a:prstGeom prst="roundRect">
             <a:avLst>
@@ -32316,7 +32316,7 @@
                 <a:ea typeface="Malgun Gothic"/>
                 <a:cs typeface="Malgun Gothic"/>
               </a:rPr>
-              <a:t>다음 상태를 방정식으로 푼다. 뻣뻣한 접촉에도 안정하지만 감쇠가 생긴다.</a:t>
+              <a:t>다음 상태를 방정식으로 푼다. stiff한 접촉에도 안정하지만 감쇠가 생긴다.</a:t>
             </a:r>
           </a:p>
         </p:txBody>
@@ -32424,7 +32424,7 @@
                 <a:ea typeface="Malgun Gothic"/>
                 <a:cs typeface="Malgun Gothic"/>
               </a:rPr>
-              <a:t>벌점 접촉은 강성과 시간 스텝을 맞바꾸고, 제약 기반 접촉은 계산을 더 쓴다</a:t>
+              <a:t>페널티 접촉은 강성과 시간 스텝을 맞바꾸고, 제약 기반 접촉은 계산을 더 쓴다</a:t>
             </a:r>
           </a:p>
         </p:txBody>
@@ -32522,7 +32522,7 @@
                 <a:ea typeface="Malgun Gothic"/>
                 <a:cs typeface="Malgun Gothic"/>
               </a:rPr>
-              <a:t>(a) 바닥 아래로 들어간 만큼 용수철 힘을 주는 벌점 접촉. 강성이 낮으면 박히고, 높은데 Δt가 크면 튀어 오른다 (b) 침투를 줄이려면 강성을, 안정하려면 작은 Δt를</a:t>
+              <a:t>(a) 바닥 아래로 들어간 만큼 용수철 힘을 주는 페널티 접촉. 강성이 낮으면 박히고, 높은데 Δt가 크면 튀어 오른다 (b) 침투를 줄이려면 강성을, 안정하려면 작은 Δt를</a:t>
             </a:r>
           </a:p>
         </p:txBody>
@@ -32664,7 +32664,7 @@
                           <a:ea typeface="Malgun Gothic"/>
                           <a:cs typeface="Malgun Gothic"/>
                         </a:rPr>
-                        <a:t>벌점(용수철·감쇠)</a:t>
+                        <a:t>페널티(용수철·감쇠)</a:t>
                       </a:r>
                     </a:p>
                   </a:txBody>
@@ -33065,7 +33065,7 @@
         </p:nvGraphicFramePr>
         <p:xfrm>
           <a:off x="711200" y="1764506"/>
-          <a:ext cx="10769600" cy="2224445"/>
+          <a:ext cx="10769601" cy="2224445"/>
         </p:xfrm>
         <a:graphic>
           <a:graphicData uri="http://schemas.openxmlformats.org/drawingml/2006/table">
@@ -33074,11 +33074,11 @@
                 <a:tableStyleId>{5C22544A-7EE6-4342-B048-85BDC9FD1C3A}</a:tableStyleId>
               </a:tblPr>
               <a:tblGrid>
-                <a:gridCol w="2326283"/>
-                <a:gridCol w="3211413"/>
-                <a:gridCol w="1540966"/>
-                <a:gridCol w="1079500"/>
-                <a:gridCol w="2611438"/>
+                <a:gridCol w="2286099"/>
+                <a:gridCol w="3155851"/>
+                <a:gridCol w="1514277"/>
+                <a:gridCol w="1060748"/>
+                <a:gridCol w="2752626"/>
               </a:tblGrid>
               <a:tr h="285477">
                 <a:tc>
@@ -33435,7 +33435,7 @@
                           <a:ea typeface="Malgun Gothic"/>
                           <a:cs typeface="Malgun Gothic"/>
                         </a:rPr>
-                        <a:t>제어·보행 연구, 동역학 자료</a:t>
+                        <a:t>제어·보행 연구, 동역학 데이터</a:t>
                       </a:r>
                     </a:p>
                   </a:txBody>
